--- a/content/2026-2/cea055-estatistica-probabilidade/08-variaveis-aleatorias-continuas/Aula_08_Variaveis_Aleatorias_Continuas_SITE.pptx
+++ b/content/2026-2/cea055-estatistica-probabilidade/08-variaveis-aleatorias-continuas/Aula_08_Variaveis_Aleatorias_Continuas_SITE.pptx
@@ -5,7 +5,7 @@
     <p:sldMasterId id="2147483648" r:id="rId1"/>
   </p:sldMasterIdLst>
   <p:notesMasterIdLst>
-    <p:notesMasterId r:id="rId28"/>
+    <p:notesMasterId r:id="rId25"/>
   </p:notesMasterIdLst>
   <p:sldIdLst>
     <p:sldId id="900" r:id="rId2"/>
@@ -17,19 +17,20 @@
     <p:sldId id="907" r:id="rId8"/>
     <p:sldId id="908" r:id="rId9"/>
     <p:sldId id="909" r:id="rId10"/>
-    <p:sldId id="910" r:id="rId12"/>
-    <p:sldId id="911" r:id="rId13"/>
-    <p:sldId id="912" r:id="rId15"/>
-    <p:sldId id="913" r:id="rId16"/>
-    <p:sldId id="914" r:id="rId17"/>
-    <p:sldId id="915" r:id="rId18"/>
-    <p:sldId id="916" r:id="rId19"/>
-    <p:sldId id="920" r:id="rId20"/>
-    <p:sldId id="917" r:id="rId22"/>
-    <p:sldId id="921" r:id="rId23"/>
-    <p:sldId id="922" r:id="rId24"/>
-    <p:sldId id="918" r:id="rId25"/>
-    <p:sldId id="919" r:id="rId27"/>
+    <p:sldId id="910" r:id="rId11"/>
+    <p:sldId id="911" r:id="rId12"/>
+    <p:sldId id="912" r:id="rId13"/>
+    <p:sldId id="913" r:id="rId14"/>
+    <p:sldId id="914" r:id="rId15"/>
+    <p:sldId id="915" r:id="rId16"/>
+    <p:sldId id="916" r:id="rId17"/>
+    <p:sldId id="920" r:id="rId18"/>
+    <p:sldId id="917" r:id="rId19"/>
+    <p:sldId id="921" r:id="rId20"/>
+    <p:sldId id="922" r:id="rId21"/>
+    <p:sldId id="918" r:id="rId22"/>
+    <p:sldId id="919" r:id="rId23"/>
+    <p:sldId id="923" r:id="rId24"/>
   </p:sldIdLst>
   <p:sldSz cx="12192000" cy="6858000"/>
   <p:notesSz cx="6858000" cy="9144000"/>
@@ -244,7 +245,7 @@
           <a:p>
             <a:fld id="{44623A65-BD25-40B6-8815-498297225DF7}" type="datetimeFigureOut">
               <a:rPr lang="pt-BR" smtClean="0"/>
-              <a:t>21/09/2026</a:t>
+              <a:t>22/10/2026</a:t>
             </a:fld>
             <a:endParaRPr lang="pt-BR" dirty="0"/>
           </a:p>
@@ -581,7 +582,7 @@
           <a:p>
             <a:fld id="{7D7F89C7-0D7F-4B10-AF98-1416A21C67FE}" type="slidenum">
               <a:rPr lang="pt-BR" smtClean="0"/>
-              <a:t>18</a:t>
+              <a:t>16</a:t>
             </a:fld>
             <a:endParaRPr lang="pt-BR" dirty="0"/>
           </a:p>
@@ -670,7 +671,7 @@
           <a:p>
             <a:fld id="{7D7F89C7-0D7F-4B10-AF98-1416A21C67FE}" type="slidenum">
               <a:rPr lang="pt-BR" smtClean="0"/>
-              <a:t>19</a:t>
+              <a:t>17</a:t>
             </a:fld>
             <a:endParaRPr lang="pt-BR" dirty="0"/>
           </a:p>
@@ -759,7 +760,7 @@
           <a:p>
             <a:fld id="{7D7F89C7-0D7F-4B10-AF98-1416A21C67FE}" type="slidenum">
               <a:rPr lang="pt-BR" smtClean="0"/>
-              <a:t>21</a:t>
+              <a:t>18</a:t>
             </a:fld>
             <a:endParaRPr lang="pt-BR" dirty="0"/>
           </a:p>
@@ -848,7 +849,7 @@
           <a:p>
             <a:fld id="{7D7F89C7-0D7F-4B10-AF98-1416A21C67FE}" type="slidenum">
               <a:rPr lang="pt-BR" smtClean="0"/>
-              <a:t>22</a:t>
+              <a:t>19</a:t>
             </a:fld>
             <a:endParaRPr lang="pt-BR" dirty="0"/>
           </a:p>
@@ -937,7 +938,7 @@
           <a:p>
             <a:fld id="{7D7F89C7-0D7F-4B10-AF98-1416A21C67FE}" type="slidenum">
               <a:rPr lang="pt-BR" smtClean="0"/>
-              <a:t>23</a:t>
+              <a:t>20</a:t>
             </a:fld>
             <a:endParaRPr lang="pt-BR" dirty="0"/>
           </a:p>
@@ -1026,7 +1027,7 @@
           <a:p>
             <a:fld id="{7D7F89C7-0D7F-4B10-AF98-1416A21C67FE}" type="slidenum">
               <a:rPr lang="pt-BR" smtClean="0"/>
-              <a:t>24</a:t>
+              <a:t>21</a:t>
             </a:fld>
             <a:endParaRPr lang="pt-BR" dirty="0"/>
           </a:p>
@@ -1192,7 +1193,7 @@
           <a:p>
             <a:fld id="{5B45E566-B383-4B2D-B951-1136FD38326E}" type="datetimeFigureOut">
               <a:rPr lang="pt-BR" smtClean="0"/>
-              <a:t>21/09/2026</a:t>
+              <a:t>22/10/2026</a:t>
             </a:fld>
             <a:endParaRPr lang="pt-BR" dirty="0"/>
           </a:p>
@@ -1390,7 +1391,7 @@
           <a:p>
             <a:fld id="{5B45E566-B383-4B2D-B951-1136FD38326E}" type="datetimeFigureOut">
               <a:rPr lang="pt-BR" smtClean="0"/>
-              <a:t>21/09/2026</a:t>
+              <a:t>22/10/2026</a:t>
             </a:fld>
             <a:endParaRPr lang="pt-BR" dirty="0"/>
           </a:p>
@@ -1598,7 +1599,7 @@
           <a:p>
             <a:fld id="{5B45E566-B383-4B2D-B951-1136FD38326E}" type="datetimeFigureOut">
               <a:rPr lang="pt-BR" smtClean="0"/>
-              <a:t>21/09/2026</a:t>
+              <a:t>22/10/2026</a:t>
             </a:fld>
             <a:endParaRPr lang="pt-BR" dirty="0"/>
           </a:p>
@@ -1796,7 +1797,7 @@
           <a:p>
             <a:fld id="{5B45E566-B383-4B2D-B951-1136FD38326E}" type="datetimeFigureOut">
               <a:rPr lang="pt-BR" smtClean="0"/>
-              <a:t>21/09/2026</a:t>
+              <a:t>22/10/2026</a:t>
             </a:fld>
             <a:endParaRPr lang="pt-BR" dirty="0"/>
           </a:p>
@@ -2071,7 +2072,7 @@
           <a:p>
             <a:fld id="{5B45E566-B383-4B2D-B951-1136FD38326E}" type="datetimeFigureOut">
               <a:rPr lang="pt-BR" smtClean="0"/>
-              <a:t>21/09/2026</a:t>
+              <a:t>22/10/2026</a:t>
             </a:fld>
             <a:endParaRPr lang="pt-BR" dirty="0"/>
           </a:p>
@@ -2336,7 +2337,7 @@
           <a:p>
             <a:fld id="{5B45E566-B383-4B2D-B951-1136FD38326E}" type="datetimeFigureOut">
               <a:rPr lang="pt-BR" smtClean="0"/>
-              <a:t>21/09/2026</a:t>
+              <a:t>22/10/2026</a:t>
             </a:fld>
             <a:endParaRPr lang="pt-BR" dirty="0"/>
           </a:p>
@@ -2748,7 +2749,7 @@
           <a:p>
             <a:fld id="{5B45E566-B383-4B2D-B951-1136FD38326E}" type="datetimeFigureOut">
               <a:rPr lang="pt-BR" smtClean="0"/>
-              <a:t>21/09/2026</a:t>
+              <a:t>22/10/2026</a:t>
             </a:fld>
             <a:endParaRPr lang="pt-BR" dirty="0"/>
           </a:p>
@@ -2889,7 +2890,7 @@
           <a:p>
             <a:fld id="{5B45E566-B383-4B2D-B951-1136FD38326E}" type="datetimeFigureOut">
               <a:rPr lang="pt-BR" smtClean="0"/>
-              <a:t>21/09/2026</a:t>
+              <a:t>22/10/2026</a:t>
             </a:fld>
             <a:endParaRPr lang="pt-BR" dirty="0"/>
           </a:p>
@@ -3002,7 +3003,7 @@
           <a:p>
             <a:fld id="{5B45E566-B383-4B2D-B951-1136FD38326E}" type="datetimeFigureOut">
               <a:rPr lang="pt-BR" smtClean="0"/>
-              <a:t>21/09/2026</a:t>
+              <a:t>22/10/2026</a:t>
             </a:fld>
             <a:endParaRPr lang="pt-BR" dirty="0"/>
           </a:p>
@@ -3313,7 +3314,7 @@
           <a:p>
             <a:fld id="{5B45E566-B383-4B2D-B951-1136FD38326E}" type="datetimeFigureOut">
               <a:rPr lang="pt-BR" smtClean="0"/>
-              <a:t>21/09/2026</a:t>
+              <a:t>22/10/2026</a:t>
             </a:fld>
             <a:endParaRPr lang="pt-BR" dirty="0"/>
           </a:p>
@@ -3601,7 +3602,7 @@
           <a:p>
             <a:fld id="{5B45E566-B383-4B2D-B951-1136FD38326E}" type="datetimeFigureOut">
               <a:rPr lang="pt-BR" smtClean="0"/>
-              <a:t>21/09/2026</a:t>
+              <a:t>22/10/2026</a:t>
             </a:fld>
             <a:endParaRPr lang="pt-BR" dirty="0"/>
           </a:p>
@@ -3866,7 +3867,7 @@
           <a:p>
             <a:fld id="{5B45E566-B383-4B2D-B951-1136FD38326E}" type="datetimeFigureOut">
               <a:rPr lang="pt-BR" smtClean="0"/>
-              <a:t>21/09/2026</a:t>
+              <a:t>22/10/2026</a:t>
             </a:fld>
             <a:endParaRPr lang="pt-BR" dirty="0"/>
           </a:p>
@@ -4582,7 +4583,7 @@
 </p:sld>
 </file>
 
-<file path=ppt/slides/slide11.xml><?xml version="1.0" encoding="utf-8"?>
+<file path=ppt/slides/slide10.xml><?xml version="1.0" encoding="utf-8"?>
 <p:sld xmlns:a="http://schemas.openxmlformats.org/drawingml/2006/main" xmlns:r="http://schemas.openxmlformats.org/officeDocument/2006/relationships" xmlns:p="http://schemas.openxmlformats.org/presentationml/2006/main">
   <p:cSld>
     <p:spTree>
@@ -5131,7 +5132,7 @@
 </p:sld>
 </file>
 
-<file path=ppt/slides/slide12.xml><?xml version="1.0" encoding="utf-8"?>
+<file path=ppt/slides/slide11.xml><?xml version="1.0" encoding="utf-8"?>
 <p:sld xmlns:a="http://schemas.openxmlformats.org/drawingml/2006/main" xmlns:r="http://schemas.openxmlformats.org/officeDocument/2006/relationships" xmlns:p="http://schemas.openxmlformats.org/presentationml/2006/main">
   <p:cSld>
     <p:spTree>
@@ -5862,7 +5863,7 @@
 </p:sld>
 </file>
 
-<file path=ppt/slides/slide14.xml><?xml version="1.0" encoding="utf-8"?>
+<file path=ppt/slides/slide12.xml><?xml version="1.0" encoding="utf-8"?>
 <p:sld xmlns:a="http://schemas.openxmlformats.org/drawingml/2006/main" xmlns:r="http://schemas.openxmlformats.org/officeDocument/2006/relationships" xmlns:p="http://schemas.openxmlformats.org/presentationml/2006/main">
   <p:cSld>
     <p:spTree>
@@ -6285,7 +6286,7 @@
 </p:sld>
 </file>
 
-<file path=ppt/slides/slide15.xml><?xml version="1.0" encoding="utf-8"?>
+<file path=ppt/slides/slide13.xml><?xml version="1.0" encoding="utf-8"?>
 <p:sld xmlns:a="http://schemas.openxmlformats.org/drawingml/2006/main" xmlns:r="http://schemas.openxmlformats.org/officeDocument/2006/relationships" xmlns:p="http://schemas.openxmlformats.org/presentationml/2006/main">
   <p:cSld>
     <p:spTree>
@@ -7002,7 +7003,7 @@
 </p:sld>
 </file>
 
-<file path=ppt/slides/slide16.xml><?xml version="1.0" encoding="utf-8"?>
+<file path=ppt/slides/slide14.xml><?xml version="1.0" encoding="utf-8"?>
 <p:sld xmlns:a="http://schemas.openxmlformats.org/drawingml/2006/main" xmlns:r="http://schemas.openxmlformats.org/officeDocument/2006/relationships" xmlns:p="http://schemas.openxmlformats.org/presentationml/2006/main">
   <p:cSld>
     <p:spTree>
@@ -7845,7 +7846,7 @@
 </p:sld>
 </file>
 
-<file path=ppt/slides/slide17.xml><?xml version="1.0" encoding="utf-8"?>
+<file path=ppt/slides/slide15.xml><?xml version="1.0" encoding="utf-8"?>
 <p:sld xmlns:a="http://schemas.openxmlformats.org/drawingml/2006/main" xmlns:r="http://schemas.openxmlformats.org/officeDocument/2006/relationships" xmlns:p="http://schemas.openxmlformats.org/presentationml/2006/main">
   <p:cSld>
     <p:spTree>
@@ -8275,7 +8276,7 @@
 </p:sld>
 </file>
 
-<file path=ppt/slides/slide18.xml><?xml version="1.0" encoding="utf-8"?>
+<file path=ppt/slides/slide16.xml><?xml version="1.0" encoding="utf-8"?>
 <p:sld xmlns:a="http://schemas.openxmlformats.org/drawingml/2006/main" xmlns:r="http://schemas.openxmlformats.org/officeDocument/2006/relationships" xmlns:p="http://schemas.openxmlformats.org/presentationml/2006/main">
   <p:cSld>
     <p:spTree>
@@ -8606,7 +8607,7 @@
 </p:sld>
 </file>
 
-<file path=ppt/slides/slide19.xml><?xml version="1.0" encoding="utf-8"?>
+<file path=ppt/slides/slide17.xml><?xml version="1.0" encoding="utf-8"?>
 <p:sld xmlns:a="http://schemas.openxmlformats.org/drawingml/2006/main" xmlns:r="http://schemas.openxmlformats.org/officeDocument/2006/relationships" xmlns:p="http://schemas.openxmlformats.org/presentationml/2006/main">
   <p:cSld>
     <p:spTree>
@@ -9082,263 +9083,7 @@
 </p:sld>
 </file>
 
-<file path=ppt/slides/slide2.xml><?xml version="1.0" encoding="utf-8"?>
-<p:sld xmlns:a="http://schemas.openxmlformats.org/drawingml/2006/main" xmlns:r="http://schemas.openxmlformats.org/officeDocument/2006/relationships" xmlns:p="http://schemas.openxmlformats.org/presentationml/2006/main">
-  <p:cSld>
-    <p:spTree>
-      <p:nvGrpSpPr>
-        <p:cNvPr id="1" name=""/>
-        <p:cNvGrpSpPr/>
-        <p:nvPr/>
-      </p:nvGrpSpPr>
-      <p:grpSpPr>
-        <a:xfrm>
-          <a:off x="0" y="0"/>
-          <a:ext cx="0" cy="0"/>
-          <a:chOff x="0" y="0"/>
-          <a:chExt cx="0" cy="0"/>
-        </a:xfrm>
-      </p:grpSpPr>
-      <mc:AlternateContent xmlns:mc="http://schemas.openxmlformats.org/markup-compatibility/2006" xmlns:a14="http://schemas.microsoft.com/office/drawing/2010/main">
-        <mc:Choice Requires="a14">
-          <p:sp>
-            <p:nvSpPr>
-              <p:cNvPr id="6" name="CaixaDeTexto 5">
-                <a:extLst>
-                  <a:ext uri="{FF2B5EF4-FFF2-40B4-BE49-F238E27FC236}">
-                    <a16:creationId xmlns:a16="http://schemas.microsoft.com/office/drawing/2014/main" id="{720B10DA-C761-4DEE-8D86-E170E1C2E981}"/>
-                  </a:ext>
-                </a:extLst>
-              </p:cNvPr>
-              <p:cNvSpPr txBox="1"/>
-              <p:nvPr/>
-            </p:nvSpPr>
-            <p:spPr>
-              <a:xfrm>
-                <a:off x="742539" y="518947"/>
-                <a:ext cx="10787610" cy="5047536"/>
-              </a:xfrm>
-              <a:prstGeom prst="rect">
-                <a:avLst/>
-              </a:prstGeom>
-              <a:noFill/>
-            </p:spPr>
-            <p:txBody>
-              <a:bodyPr wrap="square" rtlCol="0">
-                <a:spAutoFit/>
-              </a:bodyPr>
-              <a:lstStyle/>
-              <a:p>
-                <a:pPr>
-                  <a:lnSpc>
-                    <a:spcPct val="150000"/>
-                  </a:lnSpc>
-                </a:pPr>
-                <a:r>
-                  <a:rPr lang="pt-BR" sz="2800" b="1" dirty="0"/>
-                  <a:t>Variáveis aleatórias contínuas</a:t>
-                </a:r>
-              </a:p>
-              <a:p>
-                <a:pPr>
-                  <a:lnSpc>
-                    <a:spcPct val="150000"/>
-                  </a:lnSpc>
-                </a:pPr>
-                <a:r>
-                  <a:rPr lang="pt-BR" sz="2800" dirty="0"/>
-                  <a:t>Vamos comparar um histograma com a </a:t>
-                </a:r>
-                <a:r>
-                  <a:rPr lang="pt-BR" sz="2800" b="1" dirty="0"/>
-                  <a:t>distribuição de probabilidade</a:t>
-                </a:r>
-                <a:r>
-                  <a:rPr lang="pt-BR" sz="2800" dirty="0"/>
-                  <a:t> de uma variável aleatória discreta</a:t>
-                </a:r>
-              </a:p>
-              <a:p>
-                <a:pPr marL="457200" indent="-457200">
-                  <a:lnSpc>
-                    <a:spcPct val="150000"/>
-                  </a:lnSpc>
-                  <a:buFont typeface="Arial" panose="020B0604020202020204" pitchFamily="34" charset="0"/>
-                  <a:buChar char="•"/>
-                </a:pPr>
-                <a:r>
-                  <a:rPr lang="pt-BR" sz="2800" dirty="0"/>
-                  <a:t>Em um histograma a área das barras corresponde frequência (probabilidade) da realização.</a:t>
-                </a:r>
-              </a:p>
-              <a:p>
-                <a:pPr marL="457200" indent="-457200">
-                  <a:lnSpc>
-                    <a:spcPct val="150000"/>
-                  </a:lnSpc>
-                  <a:buFont typeface="Arial" panose="020B0604020202020204" pitchFamily="34" charset="0"/>
-                  <a:buChar char="•"/>
-                </a:pPr>
-                <a:r>
-                  <a:rPr lang="pt-BR" sz="2800" dirty="0"/>
-                  <a:t>O gráfico da distribuição de probabilidade exibe a probabilidade de cada valor de </a:t>
-                </a:r>
-                <a14:m>
-                  <m:oMath xmlns:m="http://schemas.openxmlformats.org/officeDocument/2006/math">
-                    <m:r>
-                      <a:rPr lang="pt-BR" sz="2800" b="0" i="1" smtClean="0">
-                        <a:latin typeface="Cambria Math" panose="02040503050406030204" pitchFamily="18" charset="0"/>
-                      </a:rPr>
-                      <m:t>𝑋</m:t>
-                    </m:r>
-                  </m:oMath>
-                </a14:m>
-                <a:r>
-                  <a:rPr lang="pt-BR" sz="2800" dirty="0"/>
-                  <a:t>: </a:t>
-                </a:r>
-                <a14:m>
-                  <m:oMath xmlns:m="http://schemas.openxmlformats.org/officeDocument/2006/math">
-                    <m:r>
-                      <a:rPr lang="pt-BR" sz="2800" b="0" i="1" dirty="0" smtClean="0">
-                        <a:latin typeface="Cambria Math" panose="02040503050406030204" pitchFamily="18" charset="0"/>
-                      </a:rPr>
-                      <m:t>𝑃</m:t>
-                    </m:r>
-                    <m:r>
-                      <a:rPr lang="pt-BR" sz="2800" i="1" dirty="0">
-                        <a:latin typeface="Cambria Math" panose="02040503050406030204" pitchFamily="18" charset="0"/>
-                      </a:rPr>
-                      <m:t>(</m:t>
-                    </m:r>
-                    <m:r>
-                      <a:rPr lang="pt-BR" sz="2800" b="0" i="1" dirty="0" smtClean="0">
-                        <a:latin typeface="Cambria Math" panose="02040503050406030204" pitchFamily="18" charset="0"/>
-                      </a:rPr>
-                      <m:t>𝑋</m:t>
-                    </m:r>
-                    <m:r>
-                      <a:rPr lang="pt-BR" sz="2800" b="0" i="1" dirty="0" smtClean="0">
-                        <a:latin typeface="Cambria Math" panose="02040503050406030204" pitchFamily="18" charset="0"/>
-                      </a:rPr>
-                      <m:t>=</m:t>
-                    </m:r>
-                    <m:r>
-                      <a:rPr lang="pt-BR" sz="2800" b="0" i="1" dirty="0" smtClean="0">
-                        <a:latin typeface="Cambria Math" panose="02040503050406030204" pitchFamily="18" charset="0"/>
-                      </a:rPr>
-                      <m:t>𝑥</m:t>
-                    </m:r>
-                    <m:r>
-                      <a:rPr lang="pt-BR" sz="2800" i="1" dirty="0">
-                        <a:latin typeface="Cambria Math" panose="02040503050406030204" pitchFamily="18" charset="0"/>
-                      </a:rPr>
-                      <m:t>).</m:t>
-                    </m:r>
-                  </m:oMath>
-                </a14:m>
-                <a:endParaRPr lang="pt-BR" sz="2800" dirty="0"/>
-              </a:p>
-              <a:p>
-                <a:endParaRPr lang="pt-BR" sz="2800" dirty="0"/>
-              </a:p>
-            </p:txBody>
-          </p:sp>
-        </mc:Choice>
-        <mc:Fallback xmlns="">
-          <p:sp>
-            <p:nvSpPr>
-              <p:cNvPr id="6" name="CaixaDeTexto 5">
-                <a:extLst>
-                  <a:ext uri="{FF2B5EF4-FFF2-40B4-BE49-F238E27FC236}">
-                    <a16:creationId xmlns:a16="http://schemas.microsoft.com/office/drawing/2014/main" id="{720B10DA-C761-4DEE-8D86-E170E1C2E981}"/>
-                  </a:ext>
-                </a:extLst>
-              </p:cNvPr>
-              <p:cNvSpPr txBox="1">
-                <a:spLocks noRot="1" noChangeAspect="1" noMove="1" noResize="1" noEditPoints="1" noAdjustHandles="1" noChangeArrowheads="1" noChangeShapeType="1" noTextEdit="1"/>
-              </p:cNvSpPr>
-              <p:nvPr/>
-            </p:nvSpPr>
-            <p:spPr>
-              <a:xfrm>
-                <a:off x="742539" y="518947"/>
-                <a:ext cx="10787610" cy="5047536"/>
-              </a:xfrm>
-              <a:prstGeom prst="rect">
-                <a:avLst/>
-              </a:prstGeom>
-              <a:blipFill>
-                <a:blip r:embed="rId2"/>
-                <a:stretch>
-                  <a:fillRect l="-1187" r="-791"/>
-                </a:stretch>
-              </a:blipFill>
-            </p:spPr>
-            <p:txBody>
-              <a:bodyPr/>
-              <a:lstStyle/>
-              <a:p>
-                <a:r>
-                  <a:rPr lang="pt-BR">
-                    <a:noFill/>
-                  </a:rPr>
-                  <a:t> </a:t>
-                </a:r>
-              </a:p>
-            </p:txBody>
-          </p:sp>
-        </mc:Fallback>
-      </mc:AlternateContent>
-      <p:sp>
-        <p:nvSpPr>
-          <p:cNvPr id="3" name="CaixaDeTexto 2">
-            <a:extLst>
-              <a:ext uri="{FF2B5EF4-FFF2-40B4-BE49-F238E27FC236}">
-                <a16:creationId xmlns:a16="http://schemas.microsoft.com/office/drawing/2014/main" id="{19131A04-B5D6-4211-8B49-4615DE5797E9}"/>
-              </a:ext>
-            </a:extLst>
-          </p:cNvPr>
-          <p:cNvSpPr txBox="1"/>
-          <p:nvPr/>
-        </p:nvSpPr>
-        <p:spPr>
-          <a:xfrm>
-            <a:off x="361395" y="6488668"/>
-            <a:ext cx="5042662" cy="300210"/>
-          </a:xfrm>
-          <a:prstGeom prst="rect">
-            <a:avLst/>
-          </a:prstGeom>
-          <a:noFill/>
-        </p:spPr>
-        <p:txBody>
-          <a:bodyPr wrap="none" rtlCol="0">
-            <a:spAutoFit/>
-          </a:bodyPr>
-          <a:lstStyle/>
-          <a:p>
-            <a:r>
-              <a:rPr lang="pt-BR" sz="1351" dirty="0"/>
-              <a:t>CEA055 - Estatística e Probabilidade - Professor: Marcos Goulart Lima</a:t>
-            </a:r>
-          </a:p>
-        </p:txBody>
-      </p:sp>
-    </p:spTree>
-    <p:extLst>
-      <p:ext uri="{BB962C8B-B14F-4D97-AF65-F5344CB8AC3E}">
-        <p14:creationId xmlns:p14="http://schemas.microsoft.com/office/powerpoint/2010/main" val="2089090679"/>
-      </p:ext>
-    </p:extLst>
-  </p:cSld>
-  <p:clrMapOvr>
-    <a:masterClrMapping/>
-  </p:clrMapOvr>
-</p:sld>
-</file>
-
-<file path=ppt/slides/slide21.xml><?xml version="1.0" encoding="utf-8"?>
+<file path=ppt/slides/slide18.xml><?xml version="1.0" encoding="utf-8"?>
 <p:sld xmlns:a="http://schemas.openxmlformats.org/drawingml/2006/main" xmlns:r="http://schemas.openxmlformats.org/officeDocument/2006/relationships" xmlns:p="http://schemas.openxmlformats.org/presentationml/2006/main">
   <p:cSld>
     <p:spTree>
@@ -10106,7 +9851,7 @@
 </p:sld>
 </file>
 
-<file path=ppt/slides/slide22.xml><?xml version="1.0" encoding="utf-8"?>
+<file path=ppt/slides/slide19.xml><?xml version="1.0" encoding="utf-8"?>
 <p:sld xmlns:a="http://schemas.openxmlformats.org/drawingml/2006/main" xmlns:r="http://schemas.openxmlformats.org/officeDocument/2006/relationships" xmlns:p="http://schemas.openxmlformats.org/presentationml/2006/main">
   <p:cSld>
     <p:spTree>
@@ -10786,7 +10531,263 @@
 </p:sld>
 </file>
 
-<file path=ppt/slides/slide23.xml><?xml version="1.0" encoding="utf-8"?>
+<file path=ppt/slides/slide2.xml><?xml version="1.0" encoding="utf-8"?>
+<p:sld xmlns:a="http://schemas.openxmlformats.org/drawingml/2006/main" xmlns:r="http://schemas.openxmlformats.org/officeDocument/2006/relationships" xmlns:p="http://schemas.openxmlformats.org/presentationml/2006/main">
+  <p:cSld>
+    <p:spTree>
+      <p:nvGrpSpPr>
+        <p:cNvPr id="1" name=""/>
+        <p:cNvGrpSpPr/>
+        <p:nvPr/>
+      </p:nvGrpSpPr>
+      <p:grpSpPr>
+        <a:xfrm>
+          <a:off x="0" y="0"/>
+          <a:ext cx="0" cy="0"/>
+          <a:chOff x="0" y="0"/>
+          <a:chExt cx="0" cy="0"/>
+        </a:xfrm>
+      </p:grpSpPr>
+      <mc:AlternateContent xmlns:mc="http://schemas.openxmlformats.org/markup-compatibility/2006" xmlns:a14="http://schemas.microsoft.com/office/drawing/2010/main">
+        <mc:Choice Requires="a14">
+          <p:sp>
+            <p:nvSpPr>
+              <p:cNvPr id="6" name="CaixaDeTexto 5">
+                <a:extLst>
+                  <a:ext uri="{FF2B5EF4-FFF2-40B4-BE49-F238E27FC236}">
+                    <a16:creationId xmlns:a16="http://schemas.microsoft.com/office/drawing/2014/main" id="{720B10DA-C761-4DEE-8D86-E170E1C2E981}"/>
+                  </a:ext>
+                </a:extLst>
+              </p:cNvPr>
+              <p:cNvSpPr txBox="1"/>
+              <p:nvPr/>
+            </p:nvSpPr>
+            <p:spPr>
+              <a:xfrm>
+                <a:off x="742539" y="518947"/>
+                <a:ext cx="10787610" cy="5047536"/>
+              </a:xfrm>
+              <a:prstGeom prst="rect">
+                <a:avLst/>
+              </a:prstGeom>
+              <a:noFill/>
+            </p:spPr>
+            <p:txBody>
+              <a:bodyPr wrap="square" rtlCol="0">
+                <a:spAutoFit/>
+              </a:bodyPr>
+              <a:lstStyle/>
+              <a:p>
+                <a:pPr>
+                  <a:lnSpc>
+                    <a:spcPct val="150000"/>
+                  </a:lnSpc>
+                </a:pPr>
+                <a:r>
+                  <a:rPr lang="pt-BR" sz="2800" b="1" dirty="0"/>
+                  <a:t>Variáveis aleatórias contínuas</a:t>
+                </a:r>
+              </a:p>
+              <a:p>
+                <a:pPr>
+                  <a:lnSpc>
+                    <a:spcPct val="150000"/>
+                  </a:lnSpc>
+                </a:pPr>
+                <a:r>
+                  <a:rPr lang="pt-BR" sz="2800" dirty="0"/>
+                  <a:t>Vamos comparar um histograma com a </a:t>
+                </a:r>
+                <a:r>
+                  <a:rPr lang="pt-BR" sz="2800" b="1" dirty="0"/>
+                  <a:t>distribuição de probabilidade</a:t>
+                </a:r>
+                <a:r>
+                  <a:rPr lang="pt-BR" sz="2800" dirty="0"/>
+                  <a:t> de uma variável aleatória discreta</a:t>
+                </a:r>
+              </a:p>
+              <a:p>
+                <a:pPr marL="457200" indent="-457200">
+                  <a:lnSpc>
+                    <a:spcPct val="150000"/>
+                  </a:lnSpc>
+                  <a:buFont typeface="Arial" panose="020B0604020202020204" pitchFamily="34" charset="0"/>
+                  <a:buChar char="•"/>
+                </a:pPr>
+                <a:r>
+                  <a:rPr lang="pt-BR" sz="2800" dirty="0"/>
+                  <a:t>Em um histograma a área das barras corresponde frequência (probabilidade) da realização.</a:t>
+                </a:r>
+              </a:p>
+              <a:p>
+                <a:pPr marL="457200" indent="-457200">
+                  <a:lnSpc>
+                    <a:spcPct val="150000"/>
+                  </a:lnSpc>
+                  <a:buFont typeface="Arial" panose="020B0604020202020204" pitchFamily="34" charset="0"/>
+                  <a:buChar char="•"/>
+                </a:pPr>
+                <a:r>
+                  <a:rPr lang="pt-BR" sz="2800" dirty="0"/>
+                  <a:t>O gráfico da distribuição de probabilidade exibe a probabilidade de cada valor de </a:t>
+                </a:r>
+                <a14:m>
+                  <m:oMath xmlns:m="http://schemas.openxmlformats.org/officeDocument/2006/math">
+                    <m:r>
+                      <a:rPr lang="pt-BR" sz="2800" b="0" i="1" smtClean="0">
+                        <a:latin typeface="Cambria Math" panose="02040503050406030204" pitchFamily="18" charset="0"/>
+                      </a:rPr>
+                      <m:t>𝑋</m:t>
+                    </m:r>
+                  </m:oMath>
+                </a14:m>
+                <a:r>
+                  <a:rPr lang="pt-BR" sz="2800" dirty="0"/>
+                  <a:t>: </a:t>
+                </a:r>
+                <a14:m>
+                  <m:oMath xmlns:m="http://schemas.openxmlformats.org/officeDocument/2006/math">
+                    <m:r>
+                      <a:rPr lang="pt-BR" sz="2800" b="0" i="1" dirty="0" smtClean="0">
+                        <a:latin typeface="Cambria Math" panose="02040503050406030204" pitchFamily="18" charset="0"/>
+                      </a:rPr>
+                      <m:t>𝑃</m:t>
+                    </m:r>
+                    <m:r>
+                      <a:rPr lang="pt-BR" sz="2800" i="1" dirty="0">
+                        <a:latin typeface="Cambria Math" panose="02040503050406030204" pitchFamily="18" charset="0"/>
+                      </a:rPr>
+                      <m:t>(</m:t>
+                    </m:r>
+                    <m:r>
+                      <a:rPr lang="pt-BR" sz="2800" b="0" i="1" dirty="0" smtClean="0">
+                        <a:latin typeface="Cambria Math" panose="02040503050406030204" pitchFamily="18" charset="0"/>
+                      </a:rPr>
+                      <m:t>𝑋</m:t>
+                    </m:r>
+                    <m:r>
+                      <a:rPr lang="pt-BR" sz="2800" b="0" i="1" dirty="0" smtClean="0">
+                        <a:latin typeface="Cambria Math" panose="02040503050406030204" pitchFamily="18" charset="0"/>
+                      </a:rPr>
+                      <m:t>=</m:t>
+                    </m:r>
+                    <m:r>
+                      <a:rPr lang="pt-BR" sz="2800" b="0" i="1" dirty="0" smtClean="0">
+                        <a:latin typeface="Cambria Math" panose="02040503050406030204" pitchFamily="18" charset="0"/>
+                      </a:rPr>
+                      <m:t>𝑥</m:t>
+                    </m:r>
+                    <m:r>
+                      <a:rPr lang="pt-BR" sz="2800" i="1" dirty="0">
+                        <a:latin typeface="Cambria Math" panose="02040503050406030204" pitchFamily="18" charset="0"/>
+                      </a:rPr>
+                      <m:t>).</m:t>
+                    </m:r>
+                  </m:oMath>
+                </a14:m>
+                <a:endParaRPr lang="pt-BR" sz="2800" dirty="0"/>
+              </a:p>
+              <a:p>
+                <a:endParaRPr lang="pt-BR" sz="2800" dirty="0"/>
+              </a:p>
+            </p:txBody>
+          </p:sp>
+        </mc:Choice>
+        <mc:Fallback xmlns="">
+          <p:sp>
+            <p:nvSpPr>
+              <p:cNvPr id="6" name="CaixaDeTexto 5">
+                <a:extLst>
+                  <a:ext uri="{FF2B5EF4-FFF2-40B4-BE49-F238E27FC236}">
+                    <a16:creationId xmlns:a16="http://schemas.microsoft.com/office/drawing/2014/main" id="{720B10DA-C761-4DEE-8D86-E170E1C2E981}"/>
+                  </a:ext>
+                </a:extLst>
+              </p:cNvPr>
+              <p:cNvSpPr txBox="1">
+                <a:spLocks noRot="1" noChangeAspect="1" noMove="1" noResize="1" noEditPoints="1" noAdjustHandles="1" noChangeArrowheads="1" noChangeShapeType="1" noTextEdit="1"/>
+              </p:cNvSpPr>
+              <p:nvPr/>
+            </p:nvSpPr>
+            <p:spPr>
+              <a:xfrm>
+                <a:off x="742539" y="518947"/>
+                <a:ext cx="10787610" cy="5047536"/>
+              </a:xfrm>
+              <a:prstGeom prst="rect">
+                <a:avLst/>
+              </a:prstGeom>
+              <a:blipFill>
+                <a:blip r:embed="rId2"/>
+                <a:stretch>
+                  <a:fillRect l="-1187" r="-791"/>
+                </a:stretch>
+              </a:blipFill>
+            </p:spPr>
+            <p:txBody>
+              <a:bodyPr/>
+              <a:lstStyle/>
+              <a:p>
+                <a:r>
+                  <a:rPr lang="pt-BR">
+                    <a:noFill/>
+                  </a:rPr>
+                  <a:t> </a:t>
+                </a:r>
+              </a:p>
+            </p:txBody>
+          </p:sp>
+        </mc:Fallback>
+      </mc:AlternateContent>
+      <p:sp>
+        <p:nvSpPr>
+          <p:cNvPr id="3" name="CaixaDeTexto 2">
+            <a:extLst>
+              <a:ext uri="{FF2B5EF4-FFF2-40B4-BE49-F238E27FC236}">
+                <a16:creationId xmlns:a16="http://schemas.microsoft.com/office/drawing/2014/main" id="{19131A04-B5D6-4211-8B49-4615DE5797E9}"/>
+              </a:ext>
+            </a:extLst>
+          </p:cNvPr>
+          <p:cNvSpPr txBox="1"/>
+          <p:nvPr/>
+        </p:nvSpPr>
+        <p:spPr>
+          <a:xfrm>
+            <a:off x="361395" y="6488668"/>
+            <a:ext cx="5042662" cy="300210"/>
+          </a:xfrm>
+          <a:prstGeom prst="rect">
+            <a:avLst/>
+          </a:prstGeom>
+          <a:noFill/>
+        </p:spPr>
+        <p:txBody>
+          <a:bodyPr wrap="none" rtlCol="0">
+            <a:spAutoFit/>
+          </a:bodyPr>
+          <a:lstStyle/>
+          <a:p>
+            <a:r>
+              <a:rPr lang="pt-BR" sz="1351" dirty="0"/>
+              <a:t>CEA055 - Estatística e Probabilidade - Professor: Marcos Goulart Lima</a:t>
+            </a:r>
+          </a:p>
+        </p:txBody>
+      </p:sp>
+    </p:spTree>
+    <p:extLst>
+      <p:ext uri="{BB962C8B-B14F-4D97-AF65-F5344CB8AC3E}">
+        <p14:creationId xmlns:p14="http://schemas.microsoft.com/office/powerpoint/2010/main" val="2089090679"/>
+      </p:ext>
+    </p:extLst>
+  </p:cSld>
+  <p:clrMapOvr>
+    <a:masterClrMapping/>
+  </p:clrMapOvr>
+</p:sld>
+</file>
+
+<file path=ppt/slides/slide20.xml><?xml version="1.0" encoding="utf-8"?>
 <p:sld xmlns:a="http://schemas.openxmlformats.org/drawingml/2006/main" xmlns:r="http://schemas.openxmlformats.org/officeDocument/2006/relationships" xmlns:p="http://schemas.openxmlformats.org/presentationml/2006/main">
   <p:cSld>
     <p:spTree>
@@ -11515,7 +11516,7 @@
 </p:sld>
 </file>
 
-<file path=ppt/slides/slide24.xml><?xml version="1.0" encoding="utf-8"?>
+<file path=ppt/slides/slide21.xml><?xml version="1.0" encoding="utf-8"?>
 <p:sld xmlns:a="http://schemas.openxmlformats.org/drawingml/2006/main" xmlns:r="http://schemas.openxmlformats.org/officeDocument/2006/relationships" xmlns:p="http://schemas.openxmlformats.org/presentationml/2006/main">
   <p:cSld>
     <p:spTree>
@@ -12414,7 +12415,7 @@
 </p:sld>
 </file>
 
-<file path=ppt/slides/slide26.xml><?xml version="1.0" encoding="utf-8"?>
+<file path=ppt/slides/slide22.xml><?xml version="1.0" encoding="utf-8"?>
 <p:sld xmlns:a="http://schemas.openxmlformats.org/drawingml/2006/main" xmlns:r="http://schemas.openxmlformats.org/officeDocument/2006/relationships" xmlns:p="http://schemas.openxmlformats.org/presentationml/2006/main">
   <p:cSld>
     <p:spTree>
@@ -12446,7 +12447,7 @@
         <p:spPr>
           <a:xfrm>
             <a:off x="795547" y="514216"/>
-            <a:ext cx="10067277" cy="5021055"/>
+            <a:ext cx="10067277" cy="3359061"/>
           </a:xfrm>
           <a:prstGeom prst="rect">
             <a:avLst/>
@@ -12529,32 +12530,13 @@
             </a:pPr>
             <a:r>
               <a:rPr lang="pt-BR" sz="2400" dirty="0"/>
-              <a:t>Morettin — Cap. 5: 5.1</a:t>
+              <a:t>Morettin — Cap. 5</a:t>
             </a:r>
-          </a:p>
-          <a:p>
-            <a:pPr>
-              <a:lnSpc>
-                <a:spcPct val="150000"/>
-              </a:lnSpc>
-            </a:pPr>
             <a:r>
-              <a:rPr lang="pt-BR" sz="2400" dirty="0"/>
-              <a:t>Exercícios recomendados:</a:t>
+              <a:rPr lang="pt-BR" sz="2400"/>
+              <a:t>: 5.1</a:t>
             </a:r>
-          </a:p>
-          <a:p>
-            <a:pPr marL="457178" indent="-457178">
-              <a:lnSpc>
-                <a:spcPct val="150000"/>
-              </a:lnSpc>
-              <a:buFont typeface="Arial" panose="020B0604020202020204" pitchFamily="34" charset="0"/>
-              <a:buChar char="•"/>
-            </a:pPr>
-            <a:r>
-              <a:rPr lang="pt-BR" sz="2400" dirty="0"/>
-              <a:t>Bussab, Cap. 7: exercícios sobre variável aleatória contínua, valor esperado e variância</a:t>
-            </a:r>
+            <a:endParaRPr lang="pt-BR" sz="2400" dirty="0"/>
           </a:p>
         </p:txBody>
       </p:sp>
@@ -12597,6 +12579,182 @@
     <p:extLst>
       <p:ext uri="{BB962C8B-B14F-4D97-AF65-F5344CB8AC3E}">
         <p14:creationId xmlns:p14="http://schemas.microsoft.com/office/powerpoint/2010/main" val="3118700238"/>
+      </p:ext>
+    </p:extLst>
+  </p:cSld>
+  <p:clrMapOvr>
+    <a:masterClrMapping/>
+  </p:clrMapOvr>
+</p:sld>
+</file>
+
+<file path=ppt/slides/slide23.xml><?xml version="1.0" encoding="utf-8"?>
+<p:sld xmlns:a="http://schemas.openxmlformats.org/drawingml/2006/main" xmlns:r="http://schemas.openxmlformats.org/officeDocument/2006/relationships" xmlns:p="http://schemas.openxmlformats.org/presentationml/2006/main">
+  <p:cSld>
+    <p:spTree>
+      <p:nvGrpSpPr>
+        <p:cNvPr id="1" name=""/>
+        <p:cNvGrpSpPr/>
+        <p:nvPr/>
+      </p:nvGrpSpPr>
+      <p:grpSpPr>
+        <a:xfrm>
+          <a:off x="0" y="0"/>
+          <a:ext cx="0" cy="0"/>
+          <a:chOff x="0" y="0"/>
+          <a:chExt cx="0" cy="0"/>
+        </a:xfrm>
+      </p:grpSpPr>
+      <p:sp>
+        <p:nvSpPr>
+          <p:cNvPr id="6" name="CaixaDeTexto 5">
+            <a:extLst>
+              <a:ext uri="{FF2B5EF4-FFF2-40B4-BE49-F238E27FC236}">
+                <a16:creationId xmlns:a16="http://schemas.microsoft.com/office/drawing/2014/main" id="{720B10DA-C761-4DEE-8D86-E170E1C2E981}"/>
+              </a:ext>
+            </a:extLst>
+          </p:cNvPr>
+          <p:cNvSpPr txBox="1"/>
+          <p:nvPr/>
+        </p:nvSpPr>
+        <p:spPr>
+          <a:xfrm>
+            <a:off x="795547" y="514216"/>
+            <a:ext cx="10067277" cy="3913059"/>
+          </a:xfrm>
+          <a:prstGeom prst="rect">
+            <a:avLst/>
+          </a:prstGeom>
+          <a:noFill/>
+        </p:spPr>
+        <p:txBody>
+          <a:bodyPr wrap="square" rtlCol="0">
+            <a:spAutoFit/>
+          </a:bodyPr>
+          <a:lstStyle/>
+          <a:p>
+            <a:pPr>
+              <a:lnSpc>
+                <a:spcPct val="150000"/>
+              </a:lnSpc>
+            </a:pPr>
+            <a:r>
+              <a:rPr lang="pt-BR" sz="2400" b="1" dirty="0"/>
+              <a:t>Atividades referentes </a:t>
+            </a:r>
+            <a:r>
+              <a:rPr lang="pt-BR" sz="2400" b="1"/>
+              <a:t>à aula (continuação)</a:t>
+            </a:r>
+            <a:endParaRPr lang="pt-BR" sz="2400" b="1" dirty="0"/>
+          </a:p>
+          <a:p>
+            <a:pPr>
+              <a:lnSpc>
+                <a:spcPct val="150000"/>
+              </a:lnSpc>
+            </a:pPr>
+            <a:r>
+              <a:rPr lang="pt-BR" sz="2400"/>
+              <a:t>Exercícios recomendados:</a:t>
+            </a:r>
+            <a:endParaRPr lang="it-IT" sz="2400"/>
+          </a:p>
+          <a:p>
+            <a:pPr marL="457178" indent="-457178">
+              <a:lnSpc>
+                <a:spcPct val="150000"/>
+              </a:lnSpc>
+              <a:buFont typeface="Arial" panose="020B0604020202020204" pitchFamily="34" charset="0"/>
+              <a:buChar char="•"/>
+            </a:pPr>
+            <a:r>
+              <a:rPr lang="it-IT" sz="2400"/>
+              <a:t>Bussab &amp; Morettin — Cap. 7: Problemas 1, 2, 4, 5, 6, 7, 9, 10, 11 e 12</a:t>
+            </a:r>
+            <a:endParaRPr lang="pt-BR" sz="2400"/>
+          </a:p>
+          <a:p>
+            <a:pPr marL="457178" indent="-457178">
+              <a:lnSpc>
+                <a:spcPct val="150000"/>
+              </a:lnSpc>
+              <a:buFont typeface="Arial" panose="020B0604020202020204" pitchFamily="34" charset="0"/>
+              <a:buChar char="•"/>
+            </a:pPr>
+            <a:r>
+              <a:rPr lang="pt-BR" sz="2400"/>
+              <a:t>Magalhães &amp; Lima — Cap. 6 (6.3 Exercícios): 3, 4, 5, 6, 7, 8, 11 e 14</a:t>
+            </a:r>
+          </a:p>
+          <a:p>
+            <a:pPr marL="457178" indent="-457178">
+              <a:lnSpc>
+                <a:spcPct val="150000"/>
+              </a:lnSpc>
+              <a:buFont typeface="Arial" panose="020B0604020202020204" pitchFamily="34" charset="0"/>
+              <a:buChar char="•"/>
+            </a:pPr>
+            <a:r>
+              <a:rPr lang="pt-BR" sz="2400"/>
+              <a:t>Montgomery &amp; Runger — Cap. 4: Exercícios 4.2.1, 4.2.6, 4.2.8, 4.2.9, 4.3.1, 4.3.2, 4.3.6 e 4.3.7</a:t>
+            </a:r>
+          </a:p>
+          <a:p>
+            <a:pPr marL="457178" indent="-457178">
+              <a:lnSpc>
+                <a:spcPct val="150000"/>
+              </a:lnSpc>
+              <a:buFont typeface="Arial" panose="020B0604020202020204" pitchFamily="34" charset="0"/>
+              <a:buChar char="•"/>
+            </a:pPr>
+            <a:r>
+              <a:rPr lang="pt-BR" sz="2400"/>
+              <a:t>Morettin — Cap. 5: Exercícios 1, 3, 4, 5, 6, 7, 9, 10 e 11</a:t>
+            </a:r>
+            <a:endParaRPr lang="pt-BR" sz="2400" dirty="0"/>
+          </a:p>
+        </p:txBody>
+      </p:sp>
+      <p:sp>
+        <p:nvSpPr>
+          <p:cNvPr id="3" name="CaixaDeTexto 2">
+            <a:extLst>
+              <a:ext uri="{FF2B5EF4-FFF2-40B4-BE49-F238E27FC236}">
+                <a16:creationId xmlns:a16="http://schemas.microsoft.com/office/drawing/2014/main" id="{19131A04-B5D6-4211-8B49-4615DE5797E9}"/>
+              </a:ext>
+            </a:extLst>
+          </p:cNvPr>
+          <p:cNvSpPr txBox="1"/>
+          <p:nvPr/>
+        </p:nvSpPr>
+        <p:spPr>
+          <a:xfrm>
+            <a:off x="361395" y="6488668"/>
+            <a:ext cx="5042662" cy="300210"/>
+          </a:xfrm>
+          <a:prstGeom prst="rect">
+            <a:avLst/>
+          </a:prstGeom>
+          <a:noFill/>
+        </p:spPr>
+        <p:txBody>
+          <a:bodyPr wrap="none" rtlCol="0">
+            <a:spAutoFit/>
+          </a:bodyPr>
+          <a:lstStyle/>
+          <a:p>
+            <a:r>
+              <a:rPr lang="pt-BR" sz="1351" dirty="0"/>
+              <a:t>CEA055 - Estatística e Probabilidade - Professor: Marcos Goulart Lima</a:t>
+            </a:r>
+          </a:p>
+        </p:txBody>
+      </p:sp>
+    </p:spTree>
+    <p:extLst>
+      <p:ext uri="{BB962C8B-B14F-4D97-AF65-F5344CB8AC3E}">
+        <p14:creationId xmlns:p14="http://schemas.microsoft.com/office/powerpoint/2010/main" val="3508867879"/>
       </p:ext>
     </p:extLst>
   </p:cSld>

--- a/content/2026-2/cea055-estatistica-probabilidade/08-variaveis-aleatorias-continuas/Aula_08_Variaveis_Aleatorias_Continuas_SITE.pptx
+++ b/content/2026-2/cea055-estatistica-probabilidade/08-variaveis-aleatorias-continuas/Aula_08_Variaveis_Aleatorias_Continuas_SITE.pptx
@@ -4444,15 +4444,23 @@
             </a:pPr>
             <a:r>
               <a:rPr lang="pt-BR" sz="2000" dirty="0"/>
-              <a:t>Montgomery, Runger. </a:t>
+              <a:t>Montgomery, Runger</a:t>
             </a:r>
             <a:r>
-              <a:rPr lang="pt-BR" sz="2000" b="1" dirty="0"/>
-              <a:t>Applied Statistics and Probability for Engineers</a:t>
+              <a:rPr lang="pt-BR" sz="2000"/>
+              <a:t>. </a:t>
+            </a:r>
+            <a:r>
+              <a:rPr lang="pt-BR" sz="2000" b="1"/>
+              <a:t>Estatística Aplicada e Probabilidade para Engenheiros</a:t>
+            </a:r>
+            <a:r>
+              <a:rPr lang="pt-BR" sz="2000"/>
+              <a:t>, 7ª ed. — </a:t>
             </a:r>
             <a:r>
               <a:rPr lang="pt-BR" sz="2000" dirty="0"/>
-              <a:t>, 7th ed — Cap. 4 (4.2, 4.3)</a:t>
+              <a:t>Cap. 4 (4.2, 4.3)</a:t>
             </a:r>
           </a:p>
           <a:p>
@@ -9208,7 +9216,19 @@
                               <a:rPr lang="pt-BR" sz="2800" i="1">
                                 <a:latin typeface="Cambria Math" panose="02040503050406030204" pitchFamily="18" charset="0"/>
                               </a:rPr>
-                              <m:t>,               0≤</m:t>
+                              <m:t>,               </m:t>
+                            </m:r>
+                            <m:r>
+                              <a:rPr lang="pt-BR" sz="2800" i="1">
+                                <a:latin typeface="Cambria Math" panose="02040503050406030204" pitchFamily="18" charset="0"/>
+                              </a:rPr>
+                              <m:t>0</m:t>
+                            </m:r>
+                            <m:r>
+                              <a:rPr lang="pt-BR" sz="2800" i="1">
+                                <a:latin typeface="Cambria Math" panose="02040503050406030204" pitchFamily="18" charset="0"/>
+                              </a:rPr>
+                              <m:t>≤</m:t>
                             </m:r>
                             <m:r>
                               <a:rPr lang="pt-BR" sz="2800" i="1">
@@ -9220,7 +9240,13 @@
                               <a:rPr lang="pt-BR" sz="2800" i="1">
                                 <a:latin typeface="Cambria Math" panose="02040503050406030204" pitchFamily="18" charset="0"/>
                               </a:rPr>
-                              <m:t>≤1</m:t>
+                              <m:t>≤</m:t>
+                            </m:r>
+                            <m:r>
+                              <a:rPr lang="pt-BR" sz="2800" i="1">
+                                <a:latin typeface="Cambria Math" panose="02040503050406030204" pitchFamily="18" charset="0"/>
+                              </a:rPr>
+                              <m:t>1</m:t>
                             </m:r>
                           </m:e>
                           <m:e>
@@ -9228,7 +9254,13 @@
                               <a:rPr lang="pt-BR" sz="2800" i="1">
                                 <a:latin typeface="Cambria Math" panose="02040503050406030204" pitchFamily="18" charset="0"/>
                               </a:rPr>
-                              <m:t>&amp;0</m:t>
+                              <m:t>&amp;</m:t>
+                            </m:r>
+                            <m:r>
+                              <a:rPr lang="pt-BR" sz="2800" i="1">
+                                <a:latin typeface="Cambria Math" panose="02040503050406030204" pitchFamily="18" charset="0"/>
+                              </a:rPr>
+                              <m:t>0</m:t>
                             </m:r>
                             <m:r>
                               <a:rPr lang="pt-BR" sz="2800" b="0" i="1" smtClean="0">
@@ -9576,7 +9608,13 @@
                           <a:rPr lang="pt-BR" sz="2800" b="0" i="1" smtClean="0">
                             <a:latin typeface="Cambria Math" panose="02040503050406030204" pitchFamily="18" charset="0"/>
                           </a:rPr>
-                          <m:t>0≤</m:t>
+                          <m:t>0</m:t>
+                        </m:r>
+                        <m:r>
+                          <a:rPr lang="pt-BR" sz="2800" b="0" i="1" smtClean="0">
+                            <a:latin typeface="Cambria Math" panose="02040503050406030204" pitchFamily="18" charset="0"/>
+                          </a:rPr>
+                          <m:t>≤</m:t>
                         </m:r>
                         <m:r>
                           <a:rPr lang="pt-BR" sz="2800" b="0" i="1" smtClean="0">
@@ -12977,7 +13015,7 @@
               <p:nvPr>
                 <p:extLst>
                   <p:ext uri="{D42A27DB-BD31-4B8C-83A1-F6EECF244321}">
-                    <p14:modId xmlns:p14="http://schemas.microsoft.com/office/powerpoint/2010/main" val="1385527954"/>
+                    <p14:modId xmlns:p14="http://schemas.microsoft.com/office/powerpoint/2010/main" val="4277367849"/>
                   </p:ext>
                 </p:extLst>
               </p:nvPr>
@@ -13063,7 +13101,7 @@
                                   <a:rPr lang="pt-BR" i="1" dirty="0" smtClean="0">
                                     <a:latin typeface="Cambria Math" panose="02040503050406030204" pitchFamily="18" charset="0"/>
                                   </a:rPr>
-                                  <m:t>𝑌</m:t>
+                                  <m:t>𝑋</m:t>
                                 </m:r>
                                 <m:r>
                                   <a:rPr lang="pt-BR" i="1" dirty="0" smtClean="0">
